--- a/a7/build/out/u6/A7 6.01 Triangle Inequality Theorem; Converse of the Pythagorean Theorem - Slides.pptx
+++ b/a7/build/out/u6/A7 6.01 Triangle Inequality Theorem; Converse of the Pythagorean Theorem - Slides.pptx
@@ -16935,7 +16935,7 @@
       </p:cxnSp>
       <p:pic>
         <p:nvPicPr>
-          <p:cNvPr id="10" name="Picture 9" descr="g81554dfe2734142e.png"/>
+          <p:cNvPr id="10" name="Picture 9" descr="g6d978ce3bc7c14d0.png"/>
           <p:cNvPicPr>
             <a:picLocks noChangeAspect="1"/>
           </p:cNvPicPr>
@@ -16949,8 +16949,8 @@
         </p:blipFill>
         <p:spPr>
           <a:xfrm>
-            <a:off x="4914900" y="1993392"/>
-            <a:ext cx="2331720" cy="2134610"/>
+            <a:off x="5006340" y="1993392"/>
+            <a:ext cx="2148840" cy="1967189"/>
           </a:xfrm>
           <a:prstGeom prst="rect">
             <a:avLst/>
@@ -16973,7 +16973,7 @@
         </p:blipFill>
         <p:spPr>
           <a:xfrm>
-            <a:off x="4081271" y="4274306"/>
+            <a:off x="4081271" y="4106885"/>
             <a:ext cx="3998975" cy="341376"/>
           </a:xfrm>
           <a:prstGeom prst="rect">
@@ -16989,7 +16989,7 @@
         </p:nvSpPr>
         <p:spPr>
           <a:xfrm>
-            <a:off x="987552" y="5024114"/>
+            <a:off x="987552" y="4856693"/>
             <a:ext cx="10131551" cy="475488"/>
           </a:xfrm>
           <a:prstGeom prst="rect">
@@ -17032,7 +17032,7 @@
         </p:blipFill>
         <p:spPr>
           <a:xfrm>
-            <a:off x="987552" y="5834278"/>
+            <a:off x="987552" y="5666858"/>
             <a:ext cx="1056124" cy="272930"/>
           </a:xfrm>
           <a:prstGeom prst="rect">
@@ -17048,7 +17048,7 @@
         </p:nvSpPr>
         <p:spPr>
           <a:xfrm>
-            <a:off x="2043676" y="5714486"/>
+            <a:off x="2043676" y="5547065"/>
             <a:ext cx="442110" cy="457200"/>
           </a:xfrm>
           <a:prstGeom prst="rect">
@@ -17091,7 +17091,7 @@
         </p:blipFill>
         <p:spPr>
           <a:xfrm>
-            <a:off x="2348626" y="5789185"/>
+            <a:off x="2348626" y="5621765"/>
             <a:ext cx="2506218" cy="265811"/>
           </a:xfrm>
           <a:prstGeom prst="rect">
@@ -17107,7 +17107,7 @@
         </p:nvSpPr>
         <p:spPr>
           <a:xfrm>
-            <a:off x="4854844" y="5714486"/>
+            <a:off x="4854844" y="5547065"/>
             <a:ext cx="1446938" cy="457200"/>
           </a:xfrm>
           <a:prstGeom prst="rect">
@@ -17150,7 +17150,7 @@
         </p:blipFill>
         <p:spPr>
           <a:xfrm>
-            <a:off x="6164623" y="5834278"/>
+            <a:off x="6164623" y="5666858"/>
             <a:ext cx="757086" cy="272930"/>
           </a:xfrm>
           <a:prstGeom prst="rect">
@@ -17166,7 +17166,7 @@
         </p:nvSpPr>
         <p:spPr>
           <a:xfrm>
-            <a:off x="6921710" y="5714486"/>
+            <a:off x="6921710" y="5547065"/>
             <a:ext cx="442110" cy="457200"/>
           </a:xfrm>
           <a:prstGeom prst="rect">
@@ -17209,7 +17209,7 @@
         </p:blipFill>
         <p:spPr>
           <a:xfrm>
-            <a:off x="7226661" y="5789185"/>
+            <a:off x="7226661" y="5621765"/>
             <a:ext cx="1450093" cy="265811"/>
           </a:xfrm>
           <a:prstGeom prst="rect">
@@ -17225,7 +17225,7 @@
         </p:nvSpPr>
         <p:spPr>
           <a:xfrm>
-            <a:off x="8676754" y="5714486"/>
+            <a:off x="8676754" y="5547065"/>
             <a:ext cx="922443" cy="457200"/>
           </a:xfrm>
           <a:prstGeom prst="rect">
@@ -17268,7 +17268,7 @@
         </p:blipFill>
         <p:spPr>
           <a:xfrm>
-            <a:off x="9462038" y="5836652"/>
+            <a:off x="9462038" y="5669231"/>
             <a:ext cx="332263" cy="215971"/>
           </a:xfrm>
           <a:prstGeom prst="rect">
@@ -17284,7 +17284,7 @@
         </p:nvSpPr>
         <p:spPr>
           <a:xfrm>
-            <a:off x="9794302" y="5714486"/>
+            <a:off x="9794302" y="5547065"/>
             <a:ext cx="277353" cy="457200"/>
           </a:xfrm>
           <a:prstGeom prst="rect">

--- a/a7/build/out/u6/A7 6.01 Triangle Inequality Theorem; Converse of the Pythagorean Theorem - Slides.pptx
+++ b/a7/build/out/u6/A7 6.01 Triangle Inequality Theorem; Converse of the Pythagorean Theorem - Slides.pptx
@@ -3695,7 +3695,7 @@
                 </a:solidFill>
                 <a:latin typeface="Lexend"/>
               </a:rPr>
-              <a:t>Can sides of 7 in, 9 in and 15 in make a triangle?</a:t>
+              <a:t>Can sides of 7 inches, 9 inches and 15 inches make a triangle?</a:t>
             </a:r>
           </a:p>
         </p:txBody>
@@ -3958,7 +3958,7 @@
                 </a:solidFill>
                 <a:latin typeface="Lexend"/>
               </a:rPr>
-              <a:t>Can sides of 7 in, 9 in and 15 in make a triangle?</a:t>
+              <a:t>Can sides of 7 inches, 9 inches and 15 inches make a triangle?</a:t>
             </a:r>
           </a:p>
         </p:txBody>
@@ -7016,7 +7016,7 @@
         <p:spPr>
           <a:xfrm>
             <a:off x="1874519" y="2052828"/>
-            <a:ext cx="2261132" cy="457200"/>
+            <a:ext cx="3016776" cy="457200"/>
           </a:xfrm>
           <a:prstGeom prst="rect">
             <a:avLst/>
@@ -7037,7 +7037,7 @@
                 </a:solidFill>
                 <a:latin typeface="Lexend"/>
               </a:rPr>
-              <a:t>2.   An area of </a:t>
+              <a:t>2.   A figure of area </a:t>
             </a:r>
           </a:p>
         </p:txBody>
@@ -7058,7 +7058,7 @@
         </p:blipFill>
         <p:spPr>
           <a:xfrm>
-            <a:off x="3998492" y="2129901"/>
+            <a:off x="4754136" y="2129901"/>
             <a:ext cx="754713" cy="265811"/>
           </a:xfrm>
           <a:prstGeom prst="rect">
@@ -7074,7 +7074,7 @@
         </p:nvSpPr>
         <p:spPr>
           <a:xfrm>
-            <a:off x="4753205" y="2052828"/>
+            <a:off x="5508849" y="2052828"/>
             <a:ext cx="2026935" cy="457200"/>
           </a:xfrm>
           <a:prstGeom prst="rect">
@@ -7117,7 +7117,7 @@
         </p:blipFill>
         <p:spPr>
           <a:xfrm>
-            <a:off x="6642980" y="2170247"/>
+            <a:off x="7398624" y="2170247"/>
             <a:ext cx="579088" cy="225464"/>
           </a:xfrm>
           <a:prstGeom prst="rect">
@@ -7133,7 +7133,7 @@
         </p:nvSpPr>
         <p:spPr>
           <a:xfrm>
-            <a:off x="7222068" y="2052828"/>
+            <a:off x="7977713" y="2052828"/>
             <a:ext cx="2738367" cy="457200"/>
           </a:xfrm>
           <a:prstGeom prst="rect">
@@ -8416,7 +8416,7 @@
         <p:spPr>
           <a:xfrm>
             <a:off x="1234440" y="2413618"/>
-            <a:ext cx="10058400" cy="429370"/>
+            <a:ext cx="10058400" cy="858740"/>
           </a:xfrm>
           <a:prstGeom prst="rect">
             <a:avLst/>
@@ -8437,7 +8437,7 @@
                 </a:solidFill>
                 <a:latin typeface="Lexend"/>
               </a:rPr>
-              <a:t>What lengths can the third side be?</a:t>
+              <a:t>Write an inequality for the length x, in centimeters, of the third side.</a:t>
             </a:r>
           </a:p>
         </p:txBody>
@@ -8749,7 +8749,7 @@
         <p:spPr>
           <a:xfrm>
             <a:off x="1234440" y="2413618"/>
-            <a:ext cx="10058400" cy="429370"/>
+            <a:ext cx="10058400" cy="858740"/>
           </a:xfrm>
           <a:prstGeom prst="rect">
             <a:avLst/>
@@ -8770,7 +8770,7 @@
                 </a:solidFill>
                 <a:latin typeface="Lexend"/>
               </a:rPr>
-              <a:t>What lengths can the third side be?</a:t>
+              <a:t>Write an inequality for the length x, in centimeters, of the third side.</a:t>
             </a:r>
           </a:p>
         </p:txBody>
@@ -8791,7 +8791,7 @@
         </p:blipFill>
         <p:spPr>
           <a:xfrm>
-            <a:off x="3496606" y="3166838"/>
+            <a:off x="4093109" y="3596209"/>
             <a:ext cx="1364551" cy="251364"/>
           </a:xfrm>
           <a:prstGeom prst="rect">
@@ -8807,7 +8807,7 @@
         </p:nvSpPr>
         <p:spPr>
           <a:xfrm>
-            <a:off x="4861158" y="3048728"/>
+            <a:off x="5457660" y="3478099"/>
             <a:ext cx="1316302" cy="457200"/>
           </a:xfrm>
           <a:prstGeom prst="rect">
@@ -8850,7 +8850,7 @@
         </p:blipFill>
         <p:spPr>
           <a:xfrm>
-            <a:off x="6040300" y="3164076"/>
+            <a:off x="6636803" y="3593447"/>
             <a:ext cx="1544097" cy="251364"/>
           </a:xfrm>
           <a:prstGeom prst="rect">
@@ -8858,41 +8858,30 @@
           </a:prstGeom>
         </p:spPr>
       </p:pic>
-      <p:sp>
-        <p:nvSpPr>
-          <p:cNvPr id="13" name="TextBox 12"/>
-          <p:cNvSpPr txBox="1"/>
-          <p:nvPr/>
-        </p:nvSpPr>
-        <p:spPr>
-          <a:xfrm>
-            <a:off x="3441742" y="3588224"/>
-            <a:ext cx="5415194" cy="457200"/>
-          </a:xfrm>
-          <a:prstGeom prst="rect">
-            <a:avLst/>
-          </a:prstGeom>
-          <a:noFill/>
-        </p:spPr>
-        <p:txBody>
-          <a:bodyPr wrap="none" lIns="45720" rIns="45720" tIns="18288" bIns="18288" anchor="ctr">
-            <a:noAutofit/>
-          </a:bodyPr>
-          <a:lstStyle/>
-          <a:p>
-            <a:pPr algn="l"/>
-            <a:r>
-              <a:rPr sz="2750" b="0" i="0">
-                <a:solidFill>
-                  <a:srgbClr val="1A1A1A"/>
-                </a:solidFill>
-                <a:latin typeface="Lexend"/>
-              </a:rPr>
-              <a:t>More than 5 and less than 19.</a:t>
-            </a:r>
-          </a:p>
-        </p:txBody>
-      </p:sp>
+      <p:pic>
+        <p:nvPicPr>
+          <p:cNvPr id="13" name="Picture 12" descr="13e3ad95332ccbdc.png"/>
+          <p:cNvPicPr>
+            <a:picLocks noChangeAspect="1"/>
+          </p:cNvPicPr>
+          <p:nvPr/>
+        </p:nvPicPr>
+        <p:blipFill>
+          <a:blip r:embed="rId4"/>
+          <a:stretch>
+            <a:fillRect/>
+          </a:stretch>
+        </p:blipFill>
+        <p:spPr>
+          <a:xfrm>
+            <a:off x="4093109" y="4134371"/>
+            <a:ext cx="1365504" cy="252984"/>
+          </a:xfrm>
+          <a:prstGeom prst="rect">
+            <a:avLst/>
+          </a:prstGeom>
+        </p:spPr>
+      </p:pic>
       <p:sp>
         <p:nvSpPr>
           <p:cNvPr id="14" name="TextBox 13"/>
@@ -8902,7 +8891,7 @@
         <p:spPr>
           <a:xfrm>
             <a:off x="777240" y="4663440"/>
-            <a:ext cx="10607040" cy="548640"/>
+            <a:ext cx="10607040" cy="1072896"/>
           </a:xfrm>
           <a:prstGeom prst="rect">
             <a:avLst/>
@@ -8923,7 +8912,7 @@
                 </a:solidFill>
                 <a:latin typeface="Lexend"/>
               </a:rPr>
-              <a:t>Answer:   More than 5 cm and less than 19 cm.</a:t>
+              <a:t>Answer:   5 &lt; x &lt; 19 — more than 5 cm and less than 19 cm.</a:t>
             </a:r>
           </a:p>
         </p:txBody>
@@ -9200,7 +9189,7 @@
         <p:spPr>
           <a:xfrm>
             <a:off x="1234440" y="2413618"/>
-            <a:ext cx="10058400" cy="429370"/>
+            <a:ext cx="10058400" cy="858740"/>
           </a:xfrm>
           <a:prstGeom prst="rect">
             <a:avLst/>
@@ -9221,7 +9210,7 @@
                 </a:solidFill>
                 <a:latin typeface="Lexend"/>
               </a:rPr>
-              <a:t>Which could be the third side?</a:t>
+              <a:t>Which inequality shows every possible length x, in centimeters, of the third side?</a:t>
             </a:r>
           </a:p>
         </p:txBody>
@@ -9234,8 +9223,8 @@
         </p:nvSpPr>
         <p:spPr>
           <a:xfrm>
-            <a:off x="1874519" y="3089876"/>
-            <a:ext cx="4572000" cy="548640"/>
+            <a:off x="1691640" y="3574111"/>
+            <a:ext cx="594360" cy="457200"/>
           </a:xfrm>
           <a:prstGeom prst="rect">
             <a:avLst/>
@@ -9256,30 +9245,104 @@
                 </a:solidFill>
                 <a:latin typeface="Lexend"/>
               </a:rPr>
-              <a:t>A.   </a:t>
-            </a:r>
-            <a:r>
-              <a:rPr sz="2280" b="0" i="0">
+              <a:t>A.</a:t>
+            </a:r>
+          </a:p>
+        </p:txBody>
+      </p:sp>
+      <p:pic>
+        <p:nvPicPr>
+          <p:cNvPr id="11" name="Picture 10" descr="0fbe6fa0ef0cae3a.png"/>
+          <p:cNvPicPr>
+            <a:picLocks noChangeAspect="1"/>
+          </p:cNvPicPr>
+          <p:nvPr/>
+        </p:nvPicPr>
+        <p:blipFill>
+          <a:blip r:embed="rId2"/>
+          <a:stretch>
+            <a:fillRect/>
+          </a:stretch>
+        </p:blipFill>
+        <p:spPr>
+          <a:xfrm>
+            <a:off x="2258568" y="3564967"/>
+            <a:ext cx="1517904" cy="280416"/>
+          </a:xfrm>
+          <a:prstGeom prst="rect">
+            <a:avLst/>
+          </a:prstGeom>
+        </p:spPr>
+      </p:pic>
+      <p:sp>
+        <p:nvSpPr>
+          <p:cNvPr id="12" name="TextBox 11"/>
+          <p:cNvSpPr txBox="1"/>
+          <p:nvPr/>
+        </p:nvSpPr>
+        <p:spPr>
+          <a:xfrm>
+            <a:off x="6537959" y="3574111"/>
+            <a:ext cx="594360" cy="457200"/>
+          </a:xfrm>
+          <a:prstGeom prst="rect">
+            <a:avLst/>
+          </a:prstGeom>
+          <a:noFill/>
+        </p:spPr>
+        <p:txBody>
+          <a:bodyPr wrap="square" lIns="45720" rIns="45720" tIns="18288" bIns="18288" anchor="t">
+            <a:spAutoFit/>
+          </a:bodyPr>
+          <a:lstStyle/>
+          <a:p>
+            <a:pPr algn="l"/>
+            <a:r>
+              <a:rPr sz="2280" b="1" i="0">
                 <a:solidFill>
                   <a:srgbClr val="1A1A1A"/>
                 </a:solidFill>
                 <a:latin typeface="Lexend"/>
               </a:rPr>
-              <a:t>3 cm</a:t>
-            </a:r>
-          </a:p>
-        </p:txBody>
-      </p:sp>
-      <p:sp>
-        <p:nvSpPr>
-          <p:cNvPr id="11" name="TextBox 10"/>
-          <p:cNvSpPr txBox="1"/>
-          <p:nvPr/>
-        </p:nvSpPr>
-        <p:spPr>
-          <a:xfrm>
-            <a:off x="6629400" y="3089876"/>
-            <a:ext cx="4572000" cy="548640"/>
+              <a:t>B.</a:t>
+            </a:r>
+          </a:p>
+        </p:txBody>
+      </p:sp>
+      <p:pic>
+        <p:nvPicPr>
+          <p:cNvPr id="13" name="Picture 12" descr="6ffc528ca75e11e8.png"/>
+          <p:cNvPicPr>
+            <a:picLocks noChangeAspect="1"/>
+          </p:cNvPicPr>
+          <p:nvPr/>
+        </p:nvPicPr>
+        <p:blipFill>
+          <a:blip r:embed="rId3"/>
+          <a:stretch>
+            <a:fillRect/>
+          </a:stretch>
+        </p:blipFill>
+        <p:spPr>
+          <a:xfrm>
+            <a:off x="7104888" y="3561919"/>
+            <a:ext cx="1612392" cy="277368"/>
+          </a:xfrm>
+          <a:prstGeom prst="rect">
+            <a:avLst/>
+          </a:prstGeom>
+        </p:spPr>
+      </p:pic>
+      <p:sp>
+        <p:nvSpPr>
+          <p:cNvPr id="14" name="TextBox 13"/>
+          <p:cNvSpPr txBox="1"/>
+          <p:nvPr/>
+        </p:nvSpPr>
+        <p:spPr>
+          <a:xfrm>
+            <a:off x="1691640" y="4186759"/>
+            <a:ext cx="594360" cy="457200"/>
           </a:xfrm>
           <a:prstGeom prst="rect">
             <a:avLst/>
@@ -9300,117 +9363,103 @@
                 </a:solidFill>
                 <a:latin typeface="Lexend"/>
               </a:rPr>
-              <a:t>B.   </a:t>
-            </a:r>
-            <a:r>
-              <a:rPr sz="2280" b="0" i="0">
+              <a:t>C.</a:t>
+            </a:r>
+          </a:p>
+        </p:txBody>
+      </p:sp>
+      <p:pic>
+        <p:nvPicPr>
+          <p:cNvPr id="15" name="Picture 14" descr="77505d489852681f.png"/>
+          <p:cNvPicPr>
+            <a:picLocks noChangeAspect="1"/>
+          </p:cNvPicPr>
+          <p:nvPr/>
+        </p:nvPicPr>
+        <p:blipFill>
+          <a:blip r:embed="rId4"/>
+          <a:stretch>
+            <a:fillRect/>
+          </a:stretch>
+        </p:blipFill>
+        <p:spPr>
+          <a:xfrm>
+            <a:off x="2258568" y="4174567"/>
+            <a:ext cx="1530096" cy="277368"/>
+          </a:xfrm>
+          <a:prstGeom prst="rect">
+            <a:avLst/>
+          </a:prstGeom>
+        </p:spPr>
+      </p:pic>
+      <p:sp>
+        <p:nvSpPr>
+          <p:cNvPr id="16" name="TextBox 15"/>
+          <p:cNvSpPr txBox="1"/>
+          <p:nvPr/>
+        </p:nvSpPr>
+        <p:spPr>
+          <a:xfrm>
+            <a:off x="6537959" y="4186759"/>
+            <a:ext cx="594360" cy="457200"/>
+          </a:xfrm>
+          <a:prstGeom prst="rect">
+            <a:avLst/>
+          </a:prstGeom>
+          <a:noFill/>
+        </p:spPr>
+        <p:txBody>
+          <a:bodyPr wrap="square" lIns="45720" rIns="45720" tIns="18288" bIns="18288" anchor="t">
+            <a:spAutoFit/>
+          </a:bodyPr>
+          <a:lstStyle/>
+          <a:p>
+            <a:pPr algn="l"/>
+            <a:r>
+              <a:rPr sz="2280" b="1" i="0">
                 <a:solidFill>
                   <a:srgbClr val="1A1A1A"/>
                 </a:solidFill>
                 <a:latin typeface="Lexend"/>
               </a:rPr>
-              <a:t>16 cm</a:t>
-            </a:r>
-          </a:p>
-        </p:txBody>
-      </p:sp>
-      <p:sp>
-        <p:nvSpPr>
-          <p:cNvPr id="12" name="TextBox 11"/>
-          <p:cNvSpPr txBox="1"/>
-          <p:nvPr/>
-        </p:nvSpPr>
-        <p:spPr>
-          <a:xfrm>
-            <a:off x="1874519" y="3775676"/>
-            <a:ext cx="4572000" cy="548640"/>
-          </a:xfrm>
-          <a:prstGeom prst="rect">
-            <a:avLst/>
-          </a:prstGeom>
-          <a:noFill/>
-        </p:spPr>
-        <p:txBody>
-          <a:bodyPr wrap="square" lIns="45720" rIns="45720" tIns="18288" bIns="18288" anchor="t">
-            <a:spAutoFit/>
-          </a:bodyPr>
-          <a:lstStyle/>
-          <a:p>
-            <a:pPr algn="l"/>
-            <a:r>
-              <a:rPr sz="2280" b="1" i="0">
-                <a:solidFill>
-                  <a:srgbClr val="1A1A1A"/>
-                </a:solidFill>
-                <a:latin typeface="Lexend"/>
-              </a:rPr>
-              <a:t>C.   </a:t>
-            </a:r>
-            <a:r>
-              <a:rPr sz="2280" b="0" i="0">
-                <a:solidFill>
-                  <a:srgbClr val="1A1A1A"/>
-                </a:solidFill>
-                <a:latin typeface="Lexend"/>
-              </a:rPr>
-              <a:t>12 cm</a:t>
-            </a:r>
-          </a:p>
-        </p:txBody>
-      </p:sp>
-      <p:sp>
-        <p:nvSpPr>
-          <p:cNvPr id="13" name="TextBox 12"/>
-          <p:cNvSpPr txBox="1"/>
-          <p:nvPr/>
-        </p:nvSpPr>
-        <p:spPr>
-          <a:xfrm>
-            <a:off x="6629400" y="3775676"/>
-            <a:ext cx="4572000" cy="548640"/>
-          </a:xfrm>
-          <a:prstGeom prst="rect">
-            <a:avLst/>
-          </a:prstGeom>
-          <a:noFill/>
-        </p:spPr>
-        <p:txBody>
-          <a:bodyPr wrap="square" lIns="45720" rIns="45720" tIns="18288" bIns="18288" anchor="t">
-            <a:spAutoFit/>
-          </a:bodyPr>
-          <a:lstStyle/>
-          <a:p>
-            <a:pPr algn="l"/>
-            <a:r>
-              <a:rPr sz="2280" b="1" i="0">
-                <a:solidFill>
-                  <a:srgbClr val="1A1A1A"/>
-                </a:solidFill>
-                <a:latin typeface="Lexend"/>
-              </a:rPr>
-              <a:t>D.   </a:t>
-            </a:r>
-            <a:r>
-              <a:rPr sz="2280" b="0" i="0">
-                <a:solidFill>
-                  <a:srgbClr val="1A1A1A"/>
-                </a:solidFill>
-                <a:latin typeface="Lexend"/>
-              </a:rPr>
-              <a:t>4 cm</a:t>
-            </a:r>
-          </a:p>
-        </p:txBody>
-      </p:sp>
-      <p:sp>
-        <p:nvSpPr>
-          <p:cNvPr id="14" name="TextBox 13"/>
-          <p:cNvSpPr txBox="1"/>
-          <p:nvPr/>
-        </p:nvSpPr>
-        <p:spPr>
-          <a:xfrm>
-            <a:off x="777240" y="4781516"/>
+              <a:t>D.</a:t>
+            </a:r>
+          </a:p>
+        </p:txBody>
+      </p:sp>
+      <p:pic>
+        <p:nvPicPr>
+          <p:cNvPr id="17" name="Picture 16" descr="c71b5ee8fe399e42.png"/>
+          <p:cNvPicPr>
+            <a:picLocks noChangeAspect="1"/>
+          </p:cNvPicPr>
+          <p:nvPr/>
+        </p:nvPicPr>
+        <p:blipFill>
+          <a:blip r:embed="rId5"/>
+          <a:stretch>
+            <a:fillRect/>
+          </a:stretch>
+        </p:blipFill>
+        <p:spPr>
+          <a:xfrm>
+            <a:off x="7104888" y="4177615"/>
+            <a:ext cx="1520952" cy="280416"/>
+          </a:xfrm>
+          <a:prstGeom prst="rect">
+            <a:avLst/>
+          </a:prstGeom>
+        </p:spPr>
+      </p:pic>
+      <p:sp>
+        <p:nvSpPr>
+          <p:cNvPr id="18" name="TextBox 17"/>
+          <p:cNvSpPr txBox="1"/>
+          <p:nvPr/>
+        </p:nvSpPr>
+        <p:spPr>
+          <a:xfrm>
+            <a:off x="777240" y="4863415"/>
             <a:ext cx="10607040" cy="457200"/>
           </a:xfrm>
           <a:prstGeom prst="rect">
@@ -9709,7 +9758,7 @@
         <p:spPr>
           <a:xfrm>
             <a:off x="1234440" y="2413618"/>
-            <a:ext cx="10058400" cy="429370"/>
+            <a:ext cx="10058400" cy="858740"/>
           </a:xfrm>
           <a:prstGeom prst="rect">
             <a:avLst/>
@@ -9730,7 +9779,7 @@
                 </a:solidFill>
                 <a:latin typeface="Lexend"/>
               </a:rPr>
-              <a:t>Which could be the third side?</a:t>
+              <a:t>Which inequality shows every possible length x, in centimeters, of the third side?</a:t>
             </a:r>
           </a:p>
         </p:txBody>
@@ -9751,7 +9800,7 @@
         </p:blipFill>
         <p:spPr>
           <a:xfrm>
-            <a:off x="3427216" y="3166838"/>
+            <a:off x="4053056" y="3596209"/>
             <a:ext cx="1414272" cy="254126"/>
           </a:xfrm>
           <a:prstGeom prst="rect">
@@ -9767,7 +9816,7 @@
         </p:nvSpPr>
         <p:spPr>
           <a:xfrm>
-            <a:off x="4841488" y="3048728"/>
+            <a:off x="5467328" y="3478099"/>
             <a:ext cx="1316302" cy="457200"/>
           </a:xfrm>
           <a:prstGeom prst="rect">
@@ -9810,7 +9859,7 @@
         </p:blipFill>
         <p:spPr>
           <a:xfrm>
-            <a:off x="6020631" y="3166838"/>
+            <a:off x="6646470" y="3596209"/>
             <a:ext cx="1571720" cy="254126"/>
           </a:xfrm>
           <a:prstGeom prst="rect">
@@ -9818,16 +9867,40 @@
           </a:prstGeom>
         </p:spPr>
       </p:pic>
-      <p:sp>
-        <p:nvSpPr>
-          <p:cNvPr id="13" name="TextBox 12"/>
-          <p:cNvSpPr txBox="1"/>
-          <p:nvPr/>
-        </p:nvSpPr>
-        <p:spPr>
-          <a:xfrm>
-            <a:off x="3372352" y="3588224"/>
-            <a:ext cx="5553974" cy="457200"/>
+      <p:pic>
+        <p:nvPicPr>
+          <p:cNvPr id="13" name="Picture 12" descr="4878d8a402d2d5a2.png"/>
+          <p:cNvPicPr>
+            <a:picLocks noChangeAspect="1"/>
+          </p:cNvPicPr>
+          <p:nvPr/>
+        </p:nvPicPr>
+        <p:blipFill>
+          <a:blip r:embed="rId4"/>
+          <a:stretch>
+            <a:fillRect/>
+          </a:stretch>
+        </p:blipFill>
+        <p:spPr>
+          <a:xfrm>
+            <a:off x="4053056" y="4130180"/>
+            <a:ext cx="1386649" cy="254126"/>
+          </a:xfrm>
+          <a:prstGeom prst="rect">
+            <a:avLst/>
+          </a:prstGeom>
+        </p:spPr>
+      </p:pic>
+      <p:sp>
+        <p:nvSpPr>
+          <p:cNvPr id="14" name="TextBox 13"/>
+          <p:cNvSpPr txBox="1"/>
+          <p:nvPr/>
+        </p:nvSpPr>
+        <p:spPr>
+          <a:xfrm>
+            <a:off x="5439706" y="4017595"/>
+            <a:ext cx="2855016" cy="457200"/>
           </a:xfrm>
           <a:prstGeom prst="rect">
             <a:avLst/>
@@ -9848,14 +9921,14 @@
                 </a:solidFill>
                 <a:latin typeface="Lexend"/>
               </a:rPr>
-              <a:t>Between 4 and 16: only 12 cm.</a:t>
-            </a:r>
-          </a:p>
-        </p:txBody>
-      </p:sp>
-      <p:sp>
-        <p:nvSpPr>
-          <p:cNvPr id="14" name="TextBox 13"/>
+              <a:t> — never equal</a:t>
+            </a:r>
+          </a:p>
+        </p:txBody>
+      </p:sp>
+      <p:sp>
+        <p:nvSpPr>
+          <p:cNvPr id="15" name="TextBox 14"/>
           <p:cNvSpPr txBox="1"/>
           <p:nvPr/>
         </p:nvSpPr>
@@ -9883,7 +9956,7 @@
                 </a:solidFill>
                 <a:latin typeface="Lexend"/>
               </a:rPr>
-              <a:t>Answer:   C — 12 cm</a:t>
+              <a:t>Answer:   C — 4 &lt; x &lt; 16</a:t>
             </a:r>
           </a:p>
         </p:txBody>
@@ -10125,7 +10198,7 @@
         <p:spPr>
           <a:xfrm>
             <a:off x="1234440" y="1874519"/>
-            <a:ext cx="10058400" cy="429370"/>
+            <a:ext cx="10058400" cy="858740"/>
           </a:xfrm>
           <a:prstGeom prst="rect">
             <a:avLst/>
@@ -10146,7 +10219,7 @@
                 </a:solidFill>
                 <a:latin typeface="Lexend"/>
               </a:rPr>
-              <a:t>Do sides of 8 in, 15 in and 17 in make a right triangle?</a:t>
+              <a:t>Do sides of 8 inches, 15 inches and 17 inches make a right triangle?</a:t>
             </a:r>
           </a:p>
         </p:txBody>
@@ -10423,7 +10496,7 @@
         <p:spPr>
           <a:xfrm>
             <a:off x="1234440" y="1874519"/>
-            <a:ext cx="10058400" cy="429370"/>
+            <a:ext cx="10058400" cy="858740"/>
           </a:xfrm>
           <a:prstGeom prst="rect">
             <a:avLst/>
@@ -10444,7 +10517,7 @@
                 </a:solidFill>
                 <a:latin typeface="Lexend"/>
               </a:rPr>
-              <a:t>Do sides of 8 in, 15 in and 17 in make a right triangle?</a:t>
+              <a:t>Do sides of 8 inches, 15 inches and 17 inches make a right triangle?</a:t>
             </a:r>
           </a:p>
         </p:txBody>
@@ -10465,7 +10538,7 @@
         </p:blipFill>
         <p:spPr>
           <a:xfrm>
-            <a:off x="3155883" y="2574590"/>
+            <a:off x="3155883" y="3003961"/>
             <a:ext cx="3749039" cy="304800"/>
           </a:xfrm>
           <a:prstGeom prst="rect">
@@ -10489,7 +10562,7 @@
         </p:blipFill>
         <p:spPr>
           <a:xfrm>
-            <a:off x="3155883" y="3111991"/>
+            <a:off x="3155883" y="3541361"/>
             <a:ext cx="1383887" cy="306609"/>
           </a:xfrm>
           <a:prstGeom prst="rect">
@@ -10505,7 +10578,7 @@
         </p:nvSpPr>
         <p:spPr>
           <a:xfrm>
-            <a:off x="4539770" y="3049126"/>
+            <a:off x="4539770" y="3478496"/>
             <a:ext cx="4712754" cy="457200"/>
           </a:xfrm>
           <a:prstGeom prst="rect">
@@ -11988,7 +12061,7 @@
         <p:spPr>
           <a:xfrm>
             <a:off x="1874519" y="2510028"/>
-            <a:ext cx="2261132" cy="457200"/>
+            <a:ext cx="3016776" cy="457200"/>
           </a:xfrm>
           <a:prstGeom prst="rect">
             <a:avLst/>
@@ -12009,7 +12082,7 @@
                 </a:solidFill>
                 <a:latin typeface="Lexend"/>
               </a:rPr>
-              <a:t>2.   An area of </a:t>
+              <a:t>2.   A figure of area </a:t>
             </a:r>
           </a:p>
         </p:txBody>
@@ -12030,7 +12103,7 @@
         </p:blipFill>
         <p:spPr>
           <a:xfrm>
-            <a:off x="3998492" y="2587101"/>
+            <a:off x="4754136" y="2587101"/>
             <a:ext cx="754713" cy="265811"/>
           </a:xfrm>
           <a:prstGeom prst="rect">
@@ -12046,7 +12119,7 @@
         </p:nvSpPr>
         <p:spPr>
           <a:xfrm>
-            <a:off x="4753205" y="2510028"/>
+            <a:off x="5508849" y="2510028"/>
             <a:ext cx="2026935" cy="457200"/>
           </a:xfrm>
           <a:prstGeom prst="rect">
@@ -12089,7 +12162,7 @@
         </p:blipFill>
         <p:spPr>
           <a:xfrm>
-            <a:off x="6642980" y="2627447"/>
+            <a:off x="7398624" y="2627447"/>
             <a:ext cx="579088" cy="225464"/>
           </a:xfrm>
           <a:prstGeom prst="rect">
@@ -12105,7 +12178,7 @@
         </p:nvSpPr>
         <p:spPr>
           <a:xfrm>
-            <a:off x="7222068" y="2510028"/>
+            <a:off x="7977713" y="2510028"/>
             <a:ext cx="2738367" cy="457200"/>
           </a:xfrm>
           <a:prstGeom prst="rect">
@@ -14314,7 +14387,7 @@
                 </a:solidFill>
                 <a:latin typeface="Lexend"/>
               </a:rPr>
-              <a:t>Can sides of 9 in, 9 in and 18 in make a triangle?</a:t>
+              <a:t>Can sides of 9 inches, 9 inches and 18 inches make a triangle?</a:t>
             </a:r>
           </a:p>
         </p:txBody>
@@ -14363,6 +14436,76 @@
         <p:spPr>
           <a:xfrm>
             <a:off x="1554480" y="2578608"/>
+            <a:ext cx="9829800" cy="768096"/>
+          </a:xfrm>
+          <a:prstGeom prst="rect">
+            <a:avLst/>
+          </a:prstGeom>
+          <a:noFill/>
+        </p:spPr>
+        <p:txBody>
+          <a:bodyPr wrap="square" lIns="45720" rIns="45720" tIns="18288" bIns="18288" anchor="t">
+            <a:spAutoFit/>
+          </a:bodyPr>
+          <a:lstStyle/>
+          <a:p>
+            <a:pPr algn="l"/>
+            <a:r>
+              <a:rPr sz="1810" b="0" i="0">
+                <a:solidFill>
+                  <a:srgbClr val="1A1A1A"/>
+                </a:solidFill>
+                <a:latin typeface="Lexend"/>
+              </a:rPr>
+              <a:t>Two sides of a triangle are 5 m and 11 m. Write an inequality for the length x, in meters, of the third side.</a:t>
+            </a:r>
+          </a:p>
+        </p:txBody>
+      </p:sp>
+      <p:sp>
+        <p:nvSpPr>
+          <p:cNvPr id="14" name="TextBox 13"/>
+          <p:cNvSpPr txBox="1"/>
+          <p:nvPr/>
+        </p:nvSpPr>
+        <p:spPr>
+          <a:xfrm>
+            <a:off x="960120" y="3438144"/>
+            <a:ext cx="548640" cy="356616"/>
+          </a:xfrm>
+          <a:prstGeom prst="rect">
+            <a:avLst/>
+          </a:prstGeom>
+          <a:noFill/>
+        </p:spPr>
+        <p:txBody>
+          <a:bodyPr wrap="square" lIns="45720" rIns="45720" tIns="18288" bIns="18288" anchor="t">
+            <a:spAutoFit/>
+          </a:bodyPr>
+          <a:lstStyle/>
+          <a:p>
+            <a:pPr algn="l"/>
+            <a:r>
+              <a:rPr sz="1810" b="1" i="0">
+                <a:solidFill>
+                  <a:srgbClr val="0B5394"/>
+                </a:solidFill>
+                <a:latin typeface="Lexend"/>
+              </a:rPr>
+              <a:t>4.</a:t>
+            </a:r>
+          </a:p>
+        </p:txBody>
+      </p:sp>
+      <p:sp>
+        <p:nvSpPr>
+          <p:cNvPr id="15" name="TextBox 14"/>
+          <p:cNvSpPr txBox="1"/>
+          <p:nvPr/>
+        </p:nvSpPr>
+        <p:spPr>
+          <a:xfrm>
+            <a:off x="1554480" y="3438144"/>
             <a:ext cx="9829800" cy="411480"/>
           </a:xfrm>
           <a:prstGeom prst="rect">
@@ -14384,20 +14527,20 @@
                 </a:solidFill>
                 <a:latin typeface="Lexend"/>
               </a:rPr>
-              <a:t>Two sides of a triangle are 5 m and 11 m. What lengths can the third side be?</a:t>
-            </a:r>
-          </a:p>
-        </p:txBody>
-      </p:sp>
-      <p:sp>
-        <p:nvSpPr>
-          <p:cNvPr id="14" name="TextBox 13"/>
-          <p:cNvSpPr txBox="1"/>
-          <p:nvPr/>
-        </p:nvSpPr>
-        <p:spPr>
-          <a:xfrm>
-            <a:off x="960120" y="3081528"/>
+              <a:t>Do sides of 28 cm, 45 cm and 53 cm make a right triangle?</a:t>
+            </a:r>
+          </a:p>
+        </p:txBody>
+      </p:sp>
+      <p:sp>
+        <p:nvSpPr>
+          <p:cNvPr id="16" name="TextBox 15"/>
+          <p:cNvSpPr txBox="1"/>
+          <p:nvPr/>
+        </p:nvSpPr>
+        <p:spPr>
+          <a:xfrm>
+            <a:off x="960120" y="3941064"/>
             <a:ext cx="548640" cy="356616"/>
           </a:xfrm>
           <a:prstGeom prst="rect">
@@ -14419,20 +14562,20 @@
                 </a:solidFill>
                 <a:latin typeface="Lexend"/>
               </a:rPr>
-              <a:t>4.</a:t>
-            </a:r>
-          </a:p>
-        </p:txBody>
-      </p:sp>
-      <p:sp>
-        <p:nvSpPr>
-          <p:cNvPr id="15" name="TextBox 14"/>
-          <p:cNvSpPr txBox="1"/>
-          <p:nvPr/>
-        </p:nvSpPr>
-        <p:spPr>
-          <a:xfrm>
-            <a:off x="1554480" y="3081528"/>
+              <a:t>5.</a:t>
+            </a:r>
+          </a:p>
+        </p:txBody>
+      </p:sp>
+      <p:sp>
+        <p:nvSpPr>
+          <p:cNvPr id="17" name="TextBox 16"/>
+          <p:cNvSpPr txBox="1"/>
+          <p:nvPr/>
+        </p:nvSpPr>
+        <p:spPr>
+          <a:xfrm>
+            <a:off x="1554480" y="3941064"/>
             <a:ext cx="9829800" cy="411480"/>
           </a:xfrm>
           <a:prstGeom prst="rect">
@@ -14454,20 +14597,20 @@
                 </a:solidFill>
                 <a:latin typeface="Lexend"/>
               </a:rPr>
-              <a:t>Do sides of 28 cm, 45 cm and 53 cm make a right triangle?</a:t>
-            </a:r>
-          </a:p>
-        </p:txBody>
-      </p:sp>
-      <p:sp>
-        <p:nvSpPr>
-          <p:cNvPr id="16" name="TextBox 15"/>
-          <p:cNvSpPr txBox="1"/>
-          <p:nvPr/>
-        </p:nvSpPr>
-        <p:spPr>
-          <a:xfrm>
-            <a:off x="960120" y="3584448"/>
+              <a:t>Do sides of 17 ft, 10 ft and 14 ft make a right triangle?</a:t>
+            </a:r>
+          </a:p>
+        </p:txBody>
+      </p:sp>
+      <p:sp>
+        <p:nvSpPr>
+          <p:cNvPr id="18" name="TextBox 17"/>
+          <p:cNvSpPr txBox="1"/>
+          <p:nvPr/>
+        </p:nvSpPr>
+        <p:spPr>
+          <a:xfrm>
+            <a:off x="960120" y="4443984"/>
             <a:ext cx="548640" cy="356616"/>
           </a:xfrm>
           <a:prstGeom prst="rect">
@@ -14489,21 +14632,21 @@
                 </a:solidFill>
                 <a:latin typeface="Lexend"/>
               </a:rPr>
-              <a:t>5.</a:t>
-            </a:r>
-          </a:p>
-        </p:txBody>
-      </p:sp>
-      <p:sp>
-        <p:nvSpPr>
-          <p:cNvPr id="17" name="TextBox 16"/>
-          <p:cNvSpPr txBox="1"/>
-          <p:nvPr/>
-        </p:nvSpPr>
-        <p:spPr>
-          <a:xfrm>
-            <a:off x="1554480" y="3584448"/>
-            <a:ext cx="9829800" cy="411480"/>
+              <a:t>6.</a:t>
+            </a:r>
+          </a:p>
+        </p:txBody>
+      </p:sp>
+      <p:sp>
+        <p:nvSpPr>
+          <p:cNvPr id="19" name="TextBox 18"/>
+          <p:cNvSpPr txBox="1"/>
+          <p:nvPr/>
+        </p:nvSpPr>
+        <p:spPr>
+          <a:xfrm>
+            <a:off x="1554480" y="4443984"/>
+            <a:ext cx="9829800" cy="768096"/>
           </a:xfrm>
           <a:prstGeom prst="rect">
             <a:avLst/>
@@ -14524,77 +14667,7 @@
                 </a:solidFill>
                 <a:latin typeface="Lexend"/>
               </a:rPr>
-              <a:t>Do sides of 17 ft, 10 ft and 14 ft make a right triangle?</a:t>
-            </a:r>
-          </a:p>
-        </p:txBody>
-      </p:sp>
-      <p:sp>
-        <p:nvSpPr>
-          <p:cNvPr id="18" name="TextBox 17"/>
-          <p:cNvSpPr txBox="1"/>
-          <p:nvPr/>
-        </p:nvSpPr>
-        <p:spPr>
-          <a:xfrm>
-            <a:off x="960120" y="4087368"/>
-            <a:ext cx="548640" cy="356616"/>
-          </a:xfrm>
-          <a:prstGeom prst="rect">
-            <a:avLst/>
-          </a:prstGeom>
-          <a:noFill/>
-        </p:spPr>
-        <p:txBody>
-          <a:bodyPr wrap="square" lIns="45720" rIns="45720" tIns="18288" bIns="18288" anchor="t">
-            <a:spAutoFit/>
-          </a:bodyPr>
-          <a:lstStyle/>
-          <a:p>
-            <a:pPr algn="l"/>
-            <a:r>
-              <a:rPr sz="1810" b="1" i="0">
-                <a:solidFill>
-                  <a:srgbClr val="0B5394"/>
-                </a:solidFill>
-                <a:latin typeface="Lexend"/>
-              </a:rPr>
-              <a:t>6.</a:t>
-            </a:r>
-          </a:p>
-        </p:txBody>
-      </p:sp>
-      <p:sp>
-        <p:nvSpPr>
-          <p:cNvPr id="19" name="TextBox 18"/>
-          <p:cNvSpPr txBox="1"/>
-          <p:nvPr/>
-        </p:nvSpPr>
-        <p:spPr>
-          <a:xfrm>
-            <a:off x="1554480" y="4087368"/>
-            <a:ext cx="9829800" cy="768096"/>
-          </a:xfrm>
-          <a:prstGeom prst="rect">
-            <a:avLst/>
-          </a:prstGeom>
-          <a:noFill/>
-        </p:spPr>
-        <p:txBody>
-          <a:bodyPr wrap="square" lIns="45720" rIns="45720" tIns="18288" bIns="18288" anchor="t">
-            <a:spAutoFit/>
-          </a:bodyPr>
-          <a:lstStyle/>
-          <a:p>
-            <a:pPr algn="l"/>
-            <a:r>
-              <a:rPr sz="1810" b="0" i="0">
-                <a:solidFill>
-                  <a:srgbClr val="1A1A1A"/>
-                </a:solidFill>
-                <a:latin typeface="Lexend"/>
-              </a:rPr>
-              <a:t>A carpenter joins boards of 30 in, 40 in and 50 in into a triangle. Is one corner a right angle?</a:t>
+              <a:t>A carpenter joins boards of 30 inches, 40 inches and 50 inches into a triangle. Is one corner a right angle?</a:t>
             </a:r>
           </a:p>
         </p:txBody>
@@ -16600,15 +16673,39 @@
           </a:prstGeom>
         </p:spPr>
       </p:pic>
-      <p:sp>
-        <p:nvSpPr>
-          <p:cNvPr id="11" name="TextBox 10"/>
-          <p:cNvSpPr txBox="1"/>
-          <p:nvPr/>
-        </p:nvSpPr>
-        <p:spPr>
-          <a:xfrm>
-            <a:off x="987552" y="3145536"/>
+      <p:pic>
+        <p:nvPicPr>
+          <p:cNvPr id="11" name="Picture 10" descr="c8ac983533cfdfcb.png"/>
+          <p:cNvPicPr>
+            <a:picLocks noChangeAspect="1"/>
+          </p:cNvPicPr>
+          <p:nvPr/>
+        </p:nvPicPr>
+        <p:blipFill>
+          <a:blip r:embed="rId3"/>
+          <a:stretch>
+            <a:fillRect/>
+          </a:stretch>
+        </p:blipFill>
+        <p:spPr>
+          <a:xfrm>
+            <a:off x="5332475" y="3048381"/>
+            <a:ext cx="1496568" cy="277368"/>
+          </a:xfrm>
+          <a:prstGeom prst="rect">
+            <a:avLst/>
+          </a:prstGeom>
+        </p:spPr>
+      </p:pic>
+      <p:sp>
+        <p:nvSpPr>
+          <p:cNvPr id="12" name="TextBox 11"/>
+          <p:cNvSpPr txBox="1"/>
+          <p:nvPr/>
+        </p:nvSpPr>
+        <p:spPr>
+          <a:xfrm>
+            <a:off x="987552" y="3941064"/>
             <a:ext cx="10131551" cy="475488"/>
           </a:xfrm>
           <a:prstGeom prst="rect">
@@ -16630,7 +16727,101 @@
                 </a:solidFill>
                 <a:latin typeface="Lexend"/>
               </a:rPr>
-              <a:t>Sides 4 and 9: the third side is more than 5 and less than 13.</a:t>
+              <a:t>Sides 4 and 9: the third side x is more than 5 and less than 13.</a:t>
+            </a:r>
+          </a:p>
+        </p:txBody>
+      </p:sp>
+      <p:sp>
+        <p:nvSpPr>
+          <p:cNvPr id="13" name="TextBox 12"/>
+          <p:cNvSpPr txBox="1"/>
+          <p:nvPr/>
+        </p:nvSpPr>
+        <p:spPr>
+          <a:xfrm>
+            <a:off x="987552" y="4631436"/>
+            <a:ext cx="1150396" cy="457200"/>
+          </a:xfrm>
+          <a:prstGeom prst="rect">
+            <a:avLst/>
+          </a:prstGeom>
+          <a:noFill/>
+        </p:spPr>
+        <p:txBody>
+          <a:bodyPr wrap="none" lIns="45720" rIns="45720" tIns="18288" bIns="18288" anchor="ctr">
+            <a:noAutofit/>
+          </a:bodyPr>
+          <a:lstStyle/>
+          <a:p>
+            <a:pPr algn="l"/>
+            <a:r>
+              <a:rPr sz="2180" b="0" i="0">
+                <a:solidFill>
+                  <a:srgbClr val="1A1A1A"/>
+                </a:solidFill>
+                <a:latin typeface="Lexend"/>
+              </a:rPr>
+              <a:t>Never </a:t>
+            </a:r>
+          </a:p>
+        </p:txBody>
+      </p:sp>
+      <p:pic>
+        <p:nvPicPr>
+          <p:cNvPr id="14" name="Picture 13" descr="86c91fb950009437.png"/>
+          <p:cNvPicPr>
+            <a:picLocks noChangeAspect="1"/>
+          </p:cNvPicPr>
+          <p:nvPr/>
+        </p:nvPicPr>
+        <p:blipFill>
+          <a:blip r:embed="rId4"/>
+          <a:stretch>
+            <a:fillRect/>
+          </a:stretch>
+        </p:blipFill>
+        <p:spPr>
+          <a:xfrm>
+            <a:off x="2000788" y="4812934"/>
+            <a:ext cx="151892" cy="156638"/>
+          </a:xfrm>
+          <a:prstGeom prst="rect">
+            <a:avLst/>
+          </a:prstGeom>
+        </p:spPr>
+      </p:pic>
+      <p:sp>
+        <p:nvSpPr>
+          <p:cNvPr id="15" name="TextBox 14"/>
+          <p:cNvSpPr txBox="1"/>
+          <p:nvPr/>
+        </p:nvSpPr>
+        <p:spPr>
+          <a:xfrm>
+            <a:off x="2152680" y="4631436"/>
+            <a:ext cx="4150392" cy="457200"/>
+          </a:xfrm>
+          <a:prstGeom prst="rect">
+            <a:avLst/>
+          </a:prstGeom>
+          <a:noFill/>
+        </p:spPr>
+        <p:txBody>
+          <a:bodyPr wrap="none" lIns="45720" rIns="45720" tIns="18288" bIns="18288" anchor="ctr">
+            <a:noAutofit/>
+          </a:bodyPr>
+          <a:lstStyle/>
+          <a:p>
+            <a:pPr algn="l"/>
+            <a:r>
+              <a:rPr sz="2180" b="0" i="0">
+                <a:solidFill>
+                  <a:srgbClr val="1A1A1A"/>
+                </a:solidFill>
+                <a:latin typeface="Lexend"/>
+              </a:rPr>
+              <a:t> : at 5 or 13 the sides lie flat.</a:t>
             </a:r>
           </a:p>
         </p:txBody>

--- a/a7/build/out/u6/A7 6.01 Triangle Inequality Theorem; Converse of the Pythagorean Theorem - Slides.pptx
+++ b/a7/build/out/u6/A7 6.01 Triangle Inequality Theorem; Converse of the Pythagorean Theorem - Slides.pptx
@@ -15105,7 +15105,7 @@
                 </a:solidFill>
                 <a:latin typeface="Lexend"/>
               </a:rPr>
-              <a:t>Every skill listed is required, to a SmartScore of 67. Due at the start of the next class.</a:t>
+              <a:t>Every skill listed is required, to a SmartScore of 67. Due by the Unit 6 test.</a:t>
             </a:r>
           </a:p>
         </p:txBody>

--- a/a7/build/out/u6/A7 6.01 Triangle Inequality Theorem; Converse of the Pythagorean Theorem - Slides.pptx
+++ b/a7/build/out/u6/A7 6.01 Triangle Inequality Theorem; Converse of the Pythagorean Theorem - Slides.pptx
@@ -4585,7 +4585,7 @@
       </p:sp>
       <p:pic>
         <p:nvPicPr>
-          <p:cNvPr id="8" name="Picture 7" descr="00b182f565455e8a.png"/>
+          <p:cNvPr id="8" name="Picture 7" descr="87196d2b2c30a0be.png"/>
           <p:cNvPicPr>
             <a:picLocks noChangeAspect="1"/>
           </p:cNvPicPr>
@@ -4600,7 +4600,7 @@
         <p:spPr>
           <a:xfrm>
             <a:off x="1828800" y="1920240"/>
-            <a:ext cx="4575048" cy="341376"/>
+            <a:ext cx="8802624" cy="341376"/>
           </a:xfrm>
           <a:prstGeom prst="rect">
             <a:avLst/>
@@ -4609,7 +4609,7 @@
       </p:pic>
       <p:pic>
         <p:nvPicPr>
-          <p:cNvPr id="9" name="Picture 8" descr="041f2b9b675da887.png"/>
+          <p:cNvPr id="9" name="Picture 8" descr="c95e4a33ff43f2b5.png"/>
           <p:cNvPicPr>
             <a:picLocks noChangeAspect="1"/>
           </p:cNvPicPr>
@@ -4624,7 +4624,7 @@
         <p:spPr>
           <a:xfrm>
             <a:off x="1828800" y="2535936"/>
-            <a:ext cx="1645920" cy="341376"/>
+            <a:ext cx="7543800" cy="426720"/>
           </a:xfrm>
           <a:prstGeom prst="rect">
             <a:avLst/>
@@ -7197,7 +7197,7 @@
       </p:sp>
       <p:pic>
         <p:nvPicPr>
-          <p:cNvPr id="15" name="Picture 14" descr="f8833b322411a1a4.png"/>
+          <p:cNvPr id="15" name="Picture 14" descr="4e10d7bff6d5fc6d.png"/>
           <p:cNvPicPr>
             <a:picLocks noChangeAspect="1"/>
           </p:cNvPicPr>
@@ -7212,7 +7212,7 @@
         <p:spPr>
           <a:xfrm>
             <a:off x="4667711" y="2709322"/>
-            <a:ext cx="806926" cy="372610"/>
+            <a:ext cx="840152" cy="372610"/>
           </a:xfrm>
           <a:prstGeom prst="rect">
             <a:avLst/>
@@ -7256,7 +7256,7 @@
       </p:sp>
       <p:pic>
         <p:nvPicPr>
-          <p:cNvPr id="17" name="Picture 16" descr="44a9be878ecf9f94.png"/>
+          <p:cNvPr id="17" name="Picture 16" descr="f536a8cceeaccc9c.png"/>
           <p:cNvPicPr>
             <a:picLocks noChangeAspect="1"/>
           </p:cNvPicPr>
@@ -7270,8 +7270,8 @@
         </p:blipFill>
         <p:spPr>
           <a:xfrm>
-            <a:off x="4694487" y="3352823"/>
-            <a:ext cx="1001537" cy="265811"/>
+            <a:off x="4694487" y="3355197"/>
+            <a:ext cx="854392" cy="263437"/>
           </a:xfrm>
           <a:prstGeom prst="rect">
             <a:avLst/>
@@ -7712,7 +7712,7 @@
                 </a:solidFill>
                 <a:latin typeface="Lexend"/>
               </a:rPr>
-              <a:t>12, 4, 6</a:t>
+              <a:t>4, 6, 12</a:t>
             </a:r>
           </a:p>
         </p:txBody>
@@ -12286,7 +12286,7 @@
       </p:sp>
       <p:pic>
         <p:nvPicPr>
-          <p:cNvPr id="17" name="Picture 16" descr="f8833b322411a1a4.png"/>
+          <p:cNvPr id="17" name="Picture 16" descr="4e10d7bff6d5fc6d.png"/>
           <p:cNvPicPr>
             <a:picLocks noChangeAspect="1"/>
           </p:cNvPicPr>
@@ -12301,7 +12301,7 @@
         <p:spPr>
           <a:xfrm>
             <a:off x="4667711" y="3623722"/>
-            <a:ext cx="806926" cy="372610"/>
+            <a:ext cx="840152" cy="372610"/>
           </a:xfrm>
           <a:prstGeom prst="rect">
             <a:avLst/>
@@ -12316,8 +12316,8 @@
         </p:nvSpPr>
         <p:spPr>
           <a:xfrm>
-            <a:off x="6023277" y="3579876"/>
-            <a:ext cx="549167" cy="457200"/>
+            <a:off x="6056503" y="3579876"/>
+            <a:ext cx="573846" cy="457200"/>
           </a:xfrm>
           <a:prstGeom prst="rect">
             <a:avLst/>
@@ -12338,7 +12338,7 @@
                 </a:solidFill>
                 <a:latin typeface="Lexend"/>
               </a:rPr>
-              <a:t>13</a:t>
+              <a:t>10</a:t>
             </a:r>
           </a:p>
         </p:txBody>
@@ -12380,7 +12380,7 @@
       </p:sp>
       <p:pic>
         <p:nvPicPr>
-          <p:cNvPr id="20" name="Picture 19" descr="44a9be878ecf9f94.png"/>
+          <p:cNvPr id="20" name="Picture 19" descr="f536a8cceeaccc9c.png"/>
           <p:cNvPicPr>
             <a:picLocks noChangeAspect="1"/>
           </p:cNvPicPr>
@@ -12394,8 +12394,8 @@
         </p:blipFill>
         <p:spPr>
           <a:xfrm>
-            <a:off x="4694487" y="4267223"/>
-            <a:ext cx="1001537" cy="265811"/>
+            <a:off x="4694487" y="4269597"/>
+            <a:ext cx="854392" cy="263437"/>
           </a:xfrm>
           <a:prstGeom prst="rect">
             <a:avLst/>
@@ -12410,8 +12410,8 @@
         </p:nvSpPr>
         <p:spPr>
           <a:xfrm>
-            <a:off x="6244665" y="4192524"/>
-            <a:ext cx="715323" cy="457200"/>
+            <a:off x="6097520" y="4192524"/>
+            <a:ext cx="772374" cy="457200"/>
           </a:xfrm>
           <a:prstGeom prst="rect">
             <a:avLst/>
@@ -12432,7 +12432,7 @@
                 </a:solidFill>
                 <a:latin typeface="Lexend"/>
               </a:rPr>
-              <a:t>169</a:t>
+              <a:t>100</a:t>
             </a:r>
           </a:p>
         </p:txBody>
@@ -17084,7 +17084,7 @@
                 </a:solidFill>
                 <a:latin typeface="Lexend"/>
               </a:rPr>
-              <a:t>III.  The legs' squares add up to the hypotenuse's square</a:t>
+              <a:t>III.  The Pythagorean Theorem, and its converse</a:t>
             </a:r>
           </a:p>
         </p:txBody>
@@ -17209,7 +17209,7 @@
       </p:sp>
       <p:pic>
         <p:nvPicPr>
-          <p:cNvPr id="13" name="Picture 12" descr="907ae7451718aaee.png"/>
+          <p:cNvPr id="13" name="Picture 12" descr="a48bb90ed9a9ae2c.png"/>
           <p:cNvPicPr>
             <a:picLocks noChangeAspect="1"/>
           </p:cNvPicPr>
@@ -17223,8 +17223,8 @@
         </p:blipFill>
         <p:spPr>
           <a:xfrm>
-            <a:off x="987552" y="5666858"/>
-            <a:ext cx="1056124" cy="272930"/>
+            <a:off x="987552" y="5669231"/>
+            <a:ext cx="1293455" cy="270557"/>
           </a:xfrm>
           <a:prstGeom prst="rect">
             <a:avLst/>
@@ -17239,7 +17239,7 @@
         </p:nvSpPr>
         <p:spPr>
           <a:xfrm>
-            <a:off x="2043676" y="5547065"/>
+            <a:off x="2281007" y="5547065"/>
             <a:ext cx="442110" cy="457200"/>
           </a:xfrm>
           <a:prstGeom prst="rect">
@@ -17268,7 +17268,7 @@
       </p:sp>
       <p:pic>
         <p:nvPicPr>
-          <p:cNvPr id="15" name="Picture 14" descr="201bd8d4d2887ae3.png"/>
+          <p:cNvPr id="15" name="Picture 14" descr="815d468610c62785.png"/>
           <p:cNvPicPr>
             <a:picLocks noChangeAspect="1"/>
           </p:cNvPicPr>
@@ -17282,8 +17282,8 @@
         </p:blipFill>
         <p:spPr>
           <a:xfrm>
-            <a:off x="2348626" y="5621765"/>
-            <a:ext cx="2506218" cy="265811"/>
+            <a:off x="2585958" y="5621765"/>
+            <a:ext cx="3006986" cy="318023"/>
           </a:xfrm>
           <a:prstGeom prst="rect">
             <a:avLst/>
@@ -17298,7 +17298,7 @@
         </p:nvSpPr>
         <p:spPr>
           <a:xfrm>
-            <a:off x="4854844" y="5547065"/>
+            <a:off x="5592945" y="5547065"/>
             <a:ext cx="1446938" cy="457200"/>
           </a:xfrm>
           <a:prstGeom prst="rect">
@@ -17341,7 +17341,7 @@
         </p:blipFill>
         <p:spPr>
           <a:xfrm>
-            <a:off x="6164623" y="5666858"/>
+            <a:off x="6902723" y="5666858"/>
             <a:ext cx="757086" cy="272930"/>
           </a:xfrm>
           <a:prstGeom prst="rect">
@@ -17357,7 +17357,7 @@
         </p:nvSpPr>
         <p:spPr>
           <a:xfrm>
-            <a:off x="6921710" y="5547065"/>
+            <a:off x="7659810" y="5547065"/>
             <a:ext cx="442110" cy="457200"/>
           </a:xfrm>
           <a:prstGeom prst="rect">
@@ -17400,7 +17400,7 @@
         </p:blipFill>
         <p:spPr>
           <a:xfrm>
-            <a:off x="7226661" y="5621765"/>
+            <a:off x="7964761" y="5621765"/>
             <a:ext cx="1450093" cy="265811"/>
           </a:xfrm>
           <a:prstGeom prst="rect">
@@ -17416,7 +17416,7 @@
         </p:nvSpPr>
         <p:spPr>
           <a:xfrm>
-            <a:off x="8676754" y="5547065"/>
+            <a:off x="9414855" y="5547065"/>
             <a:ext cx="922443" cy="457200"/>
           </a:xfrm>
           <a:prstGeom prst="rect">
@@ -17459,7 +17459,7 @@
         </p:blipFill>
         <p:spPr>
           <a:xfrm>
-            <a:off x="9462038" y="5669231"/>
+            <a:off x="10200139" y="5669231"/>
             <a:ext cx="332263" cy="215971"/>
           </a:xfrm>
           <a:prstGeom prst="rect">
@@ -17475,7 +17475,7 @@
         </p:nvSpPr>
         <p:spPr>
           <a:xfrm>
-            <a:off x="9794302" y="5547065"/>
+            <a:off x="10532402" y="5547065"/>
             <a:ext cx="277353" cy="457200"/>
           </a:xfrm>
           <a:prstGeom prst="rect">
